--- a/chimney_fan.pptx
+++ b/chimney_fan.pptx
@@ -260,7 +260,7 @@
           <a:lstStyle/>
           <a:p>
             <a:fld id="{5F491023-0B0A-7041-9F06-D25A50EF063B}" type="datetimeFigureOut">
-              <a:t>12/30/22</a:t>
+              <a:t>12/31/22</a:t>
             </a:fld>
             <a:endParaRPr lang="en-US"/>
           </a:p>
@@ -456,7 +456,7 @@
           <a:lstStyle/>
           <a:p>
             <a:fld id="{5F491023-0B0A-7041-9F06-D25A50EF063B}" type="datetimeFigureOut">
-              <a:t>12/30/22</a:t>
+              <a:t>12/31/22</a:t>
             </a:fld>
             <a:endParaRPr lang="en-US"/>
           </a:p>
@@ -662,7 +662,7 @@
           <a:lstStyle/>
           <a:p>
             <a:fld id="{5F491023-0B0A-7041-9F06-D25A50EF063B}" type="datetimeFigureOut">
-              <a:t>12/30/22</a:t>
+              <a:t>12/31/22</a:t>
             </a:fld>
             <a:endParaRPr lang="en-US"/>
           </a:p>
@@ -858,7 +858,7 @@
           <a:lstStyle/>
           <a:p>
             <a:fld id="{5F491023-0B0A-7041-9F06-D25A50EF063B}" type="datetimeFigureOut">
-              <a:t>12/30/22</a:t>
+              <a:t>12/31/22</a:t>
             </a:fld>
             <a:endParaRPr lang="en-US"/>
           </a:p>
@@ -1131,7 +1131,7 @@
           <a:lstStyle/>
           <a:p>
             <a:fld id="{5F491023-0B0A-7041-9F06-D25A50EF063B}" type="datetimeFigureOut">
-              <a:t>12/30/22</a:t>
+              <a:t>12/31/22</a:t>
             </a:fld>
             <a:endParaRPr lang="en-US"/>
           </a:p>
@@ -1394,7 +1394,7 @@
           <a:lstStyle/>
           <a:p>
             <a:fld id="{5F491023-0B0A-7041-9F06-D25A50EF063B}" type="datetimeFigureOut">
-              <a:t>12/30/22</a:t>
+              <a:t>12/31/22</a:t>
             </a:fld>
             <a:endParaRPr lang="en-US"/>
           </a:p>
@@ -1804,7 +1804,7 @@
           <a:lstStyle/>
           <a:p>
             <a:fld id="{5F491023-0B0A-7041-9F06-D25A50EF063B}" type="datetimeFigureOut">
-              <a:t>12/30/22</a:t>
+              <a:t>12/31/22</a:t>
             </a:fld>
             <a:endParaRPr lang="en-US"/>
           </a:p>
@@ -1943,7 +1943,7 @@
           <a:lstStyle/>
           <a:p>
             <a:fld id="{5F491023-0B0A-7041-9F06-D25A50EF063B}" type="datetimeFigureOut">
-              <a:t>12/30/22</a:t>
+              <a:t>12/31/22</a:t>
             </a:fld>
             <a:endParaRPr lang="en-US"/>
           </a:p>
@@ -2054,7 +2054,7 @@
           <a:lstStyle/>
           <a:p>
             <a:fld id="{5F491023-0B0A-7041-9F06-D25A50EF063B}" type="datetimeFigureOut">
-              <a:t>12/30/22</a:t>
+              <a:t>12/31/22</a:t>
             </a:fld>
             <a:endParaRPr lang="en-US"/>
           </a:p>
@@ -2363,7 +2363,7 @@
           <a:lstStyle/>
           <a:p>
             <a:fld id="{5F491023-0B0A-7041-9F06-D25A50EF063B}" type="datetimeFigureOut">
-              <a:t>12/30/22</a:t>
+              <a:t>12/31/22</a:t>
             </a:fld>
             <a:endParaRPr lang="en-US"/>
           </a:p>
@@ -2649,7 +2649,7 @@
           <a:lstStyle/>
           <a:p>
             <a:fld id="{5F491023-0B0A-7041-9F06-D25A50EF063B}" type="datetimeFigureOut">
-              <a:t>12/30/22</a:t>
+              <a:t>12/31/22</a:t>
             </a:fld>
             <a:endParaRPr lang="en-US"/>
           </a:p>
@@ -2888,7 +2888,7 @@
           </a:lstStyle>
           <a:p>
             <a:fld id="{5F491023-0B0A-7041-9F06-D25A50EF063B}" type="datetimeFigureOut">
-              <a:t>12/30/22</a:t>
+              <a:t>12/31/22</a:t>
             </a:fld>
             <a:endParaRPr lang="en-US"/>
           </a:p>
@@ -3393,7 +3393,7 @@
         </p:blipFill>
         <p:spPr>
           <a:xfrm>
-            <a:off x="405150" y="3666333"/>
+            <a:off x="395423" y="3812248"/>
             <a:ext cx="2305957" cy="2184400"/>
           </a:xfrm>
           <a:prstGeom prst="rect">
@@ -3429,7 +3429,7 @@
         </p:blipFill>
         <p:spPr>
           <a:xfrm>
-            <a:off x="2979057" y="3654583"/>
+            <a:off x="2701380" y="3812248"/>
             <a:ext cx="2305957" cy="2196150"/>
           </a:xfrm>
           <a:prstGeom prst="rect">
@@ -3465,7 +3465,7 @@
         </p:blipFill>
         <p:spPr>
           <a:xfrm>
-            <a:off x="5829895" y="3783841"/>
+            <a:off x="5159109" y="3812248"/>
             <a:ext cx="2154185" cy="2196150"/>
           </a:xfrm>
           <a:prstGeom prst="rect">
@@ -3501,7 +3501,7 @@
         </p:blipFill>
         <p:spPr>
           <a:xfrm>
-            <a:off x="250370" y="1206249"/>
+            <a:off x="185570" y="554496"/>
             <a:ext cx="1832429" cy="1810191"/>
           </a:xfrm>
           <a:prstGeom prst="rect">
@@ -3537,7 +3537,7 @@
         </p:blipFill>
         <p:spPr>
           <a:xfrm>
-            <a:off x="9549101" y="978174"/>
+            <a:off x="10366224" y="306965"/>
             <a:ext cx="1541114" cy="1884136"/>
           </a:xfrm>
           <a:prstGeom prst="rect">
@@ -3545,6 +3545,70 @@
           </a:prstGeom>
         </p:spPr>
       </p:pic>
+      <p:sp>
+        <p:nvSpPr>
+          <p:cNvPr id="8" name="TextBox 7">
+            <a:extLst>
+              <a:ext uri="{FF2B5EF4-FFF2-40B4-BE49-F238E27FC236}">
+                <a16:creationId xmlns:a16="http://schemas.microsoft.com/office/drawing/2014/main" id="{519074FB-33E1-EC08-AE2A-42103F180C41}"/>
+              </a:ext>
+            </a:extLst>
+          </p:cNvPr>
+          <p:cNvSpPr txBox="1"/>
+          <p:nvPr/>
+        </p:nvSpPr>
+        <p:spPr>
+          <a:xfrm>
+            <a:off x="7973607" y="3589507"/>
+            <a:ext cx="3822970" cy="1600438"/>
+          </a:xfrm>
+          <a:prstGeom prst="rect">
+            <a:avLst/>
+          </a:prstGeom>
+          <a:solidFill>
+            <a:schemeClr val="accent4">
+              <a:lumMod val="20000"/>
+              <a:lumOff val="80000"/>
+            </a:schemeClr>
+          </a:solidFill>
+          <a:ln>
+            <a:solidFill>
+              <a:srgbClr val="FF0000"/>
+            </a:solidFill>
+          </a:ln>
+        </p:spPr>
+        <p:txBody>
+          <a:bodyPr wrap="square" rtlCol="0">
+            <a:spAutoFit/>
+          </a:bodyPr>
+          <a:lstStyle/>
+          <a:p>
+            <a:r>
+              <a:rPr lang="en-US" sz="1400" dirty="0"/>
+              <a:t>Tip:</a:t>
+            </a:r>
+          </a:p>
+          <a:p>
+            <a:r>
+              <a:rPr lang="en-US" sz="1400" dirty="0"/>
+              <a:t>to prevent the smoke from getting into the room when you ignite the fire:</a:t>
+            </a:r>
+          </a:p>
+          <a:p>
+            <a:endParaRPr lang="en-US" sz="1400" dirty="0"/>
+          </a:p>
+          <a:p>
+            <a:r>
+              <a:rPr lang="en-US" sz="1400" dirty="0">
+                <a:solidFill>
+                  <a:srgbClr val="00B050"/>
+                </a:solidFill>
+              </a:rPr>
+              <a:t>simply open the outer door or window to remove the air pressure difference between the room and outside.</a:t>
+            </a:r>
+          </a:p>
+        </p:txBody>
+      </p:sp>
     </p:spTree>
     <p:extLst>
       <p:ext uri="{BB962C8B-B14F-4D97-AF65-F5344CB8AC3E}">

--- a/chimney_fan.pptx
+++ b/chimney_fan.pptx
@@ -8,6 +8,7 @@
     <p:sldId id="261" r:id="rId2"/>
     <p:sldId id="262" r:id="rId3"/>
     <p:sldId id="263" r:id="rId4"/>
+    <p:sldId id="264" r:id="rId5"/>
   </p:sldIdLst>
   <p:sldSz cx="12192000" cy="6858000"/>
   <p:notesSz cx="6858000" cy="9144000"/>
@@ -4184,6 +4185,600 @@
 </p:sld>
 </file>
 
+<file path=ppt/slides/slide4.xml><?xml version="1.0" encoding="utf-8"?>
+<p:sld xmlns:a="http://schemas.openxmlformats.org/drawingml/2006/main" xmlns:r="http://schemas.openxmlformats.org/officeDocument/2006/relationships" xmlns:p="http://schemas.openxmlformats.org/presentationml/2006/main">
+  <p:cSld>
+    <p:spTree>
+      <p:nvGrpSpPr>
+        <p:cNvPr id="1" name=""/>
+        <p:cNvGrpSpPr/>
+        <p:nvPr/>
+      </p:nvGrpSpPr>
+      <p:grpSpPr>
+        <a:xfrm>
+          <a:off x="0" y="0"/>
+          <a:ext cx="0" cy="0"/>
+          <a:chOff x="0" y="0"/>
+          <a:chExt cx="0" cy="0"/>
+        </a:xfrm>
+      </p:grpSpPr>
+      <p:sp>
+        <p:nvSpPr>
+          <p:cNvPr id="2" name="TextBox 1">
+            <a:extLst>
+              <a:ext uri="{FF2B5EF4-FFF2-40B4-BE49-F238E27FC236}">
+                <a16:creationId xmlns:a16="http://schemas.microsoft.com/office/drawing/2014/main" id="{AB61EA96-0201-CE35-F837-17BACAA3BD60}"/>
+              </a:ext>
+            </a:extLst>
+          </p:cNvPr>
+          <p:cNvSpPr txBox="1"/>
+          <p:nvPr/>
+        </p:nvSpPr>
+        <p:spPr>
+          <a:xfrm>
+            <a:off x="0" y="0"/>
+            <a:ext cx="5457217" cy="523220"/>
+          </a:xfrm>
+          <a:prstGeom prst="rect">
+            <a:avLst/>
+          </a:prstGeom>
+          <a:noFill/>
+        </p:spPr>
+        <p:txBody>
+          <a:bodyPr wrap="square" rtlCol="0">
+            <a:spAutoFit/>
+          </a:bodyPr>
+          <a:lstStyle/>
+          <a:p>
+            <a:r>
+              <a:rPr lang="en-US" sz="2800" b="1" dirty="0"/>
+              <a:t>Walking Over the Shingled Roof</a:t>
+            </a:r>
+          </a:p>
+        </p:txBody>
+      </p:sp>
+      <p:pic>
+        <p:nvPicPr>
+          <p:cNvPr id="4" name="Picture 3">
+            <a:extLst>
+              <a:ext uri="{FF2B5EF4-FFF2-40B4-BE49-F238E27FC236}">
+                <a16:creationId xmlns:a16="http://schemas.microsoft.com/office/drawing/2014/main" id="{4669E1F2-5BC3-F2A1-A58D-1DF1D06568AF}"/>
+              </a:ext>
+            </a:extLst>
+          </p:cNvPr>
+          <p:cNvPicPr>
+            <a:picLocks noChangeAspect="1"/>
+          </p:cNvPicPr>
+          <p:nvPr/>
+        </p:nvPicPr>
+        <p:blipFill>
+          <a:blip r:embed="rId2" cstate="email">
+            <a:extLst>
+              <a:ext uri="{28A0092B-C50C-407E-A947-70E740481C1C}">
+                <a14:useLocalDpi xmlns:a14="http://schemas.microsoft.com/office/drawing/2010/main"/>
+              </a:ext>
+            </a:extLst>
+          </a:blip>
+          <a:stretch>
+            <a:fillRect/>
+          </a:stretch>
+        </p:blipFill>
+        <p:spPr>
+          <a:xfrm>
+            <a:off x="175234" y="1296751"/>
+            <a:ext cx="3871473" cy="1916571"/>
+          </a:xfrm>
+          <a:prstGeom prst="rect">
+            <a:avLst/>
+          </a:prstGeom>
+        </p:spPr>
+      </p:pic>
+      <p:sp>
+        <p:nvSpPr>
+          <p:cNvPr id="5" name="TextBox 4">
+            <a:extLst>
+              <a:ext uri="{FF2B5EF4-FFF2-40B4-BE49-F238E27FC236}">
+                <a16:creationId xmlns:a16="http://schemas.microsoft.com/office/drawing/2014/main" id="{F4D3CB1A-12B6-AD0F-4AFD-44766153E0B4}"/>
+              </a:ext>
+            </a:extLst>
+          </p:cNvPr>
+          <p:cNvSpPr txBox="1"/>
+          <p:nvPr/>
+        </p:nvSpPr>
+        <p:spPr>
+          <a:xfrm>
+            <a:off x="165370" y="622570"/>
+            <a:ext cx="4533090" cy="276999"/>
+          </a:xfrm>
+          <a:prstGeom prst="rect">
+            <a:avLst/>
+          </a:prstGeom>
+          <a:noFill/>
+        </p:spPr>
+        <p:txBody>
+          <a:bodyPr wrap="square" rtlCol="0">
+            <a:spAutoFit/>
+          </a:bodyPr>
+          <a:lstStyle/>
+          <a:p>
+            <a:r>
+              <a:rPr lang="en-US" sz="1200" dirty="0">
+                <a:hlinkClick r:id="rId3"/>
+              </a:rPr>
+              <a:t>https://</a:t>
+            </a:r>
+            <a:r>
+              <a:rPr lang="en-US" sz="1200" dirty="0" err="1">
+                <a:hlinkClick r:id="rId3"/>
+              </a:rPr>
+              <a:t>joylandroofing.com</a:t>
+            </a:r>
+            <a:r>
+              <a:rPr lang="en-US" sz="1200" dirty="0">
+                <a:hlinkClick r:id="rId3"/>
+              </a:rPr>
+              <a:t>/blog/damage-walking-on-shingled-roof/</a:t>
+            </a:r>
+            <a:endParaRPr lang="en-US" sz="1200" dirty="0"/>
+          </a:p>
+        </p:txBody>
+      </p:sp>
+      <p:sp>
+        <p:nvSpPr>
+          <p:cNvPr id="6" name="TextBox 5">
+            <a:extLst>
+              <a:ext uri="{FF2B5EF4-FFF2-40B4-BE49-F238E27FC236}">
+                <a16:creationId xmlns:a16="http://schemas.microsoft.com/office/drawing/2014/main" id="{740E2520-F6B7-41D5-9678-A5D5C2DEB5FB}"/>
+              </a:ext>
+            </a:extLst>
+          </p:cNvPr>
+          <p:cNvSpPr txBox="1"/>
+          <p:nvPr/>
+        </p:nvSpPr>
+        <p:spPr>
+          <a:xfrm>
+            <a:off x="165370" y="3429000"/>
+            <a:ext cx="4314163" cy="1384995"/>
+          </a:xfrm>
+          <a:prstGeom prst="rect">
+            <a:avLst/>
+          </a:prstGeom>
+          <a:solidFill>
+            <a:schemeClr val="accent4">
+              <a:lumMod val="20000"/>
+              <a:lumOff val="80000"/>
+            </a:schemeClr>
+          </a:solidFill>
+          <a:ln>
+            <a:solidFill>
+              <a:srgbClr val="FF0000"/>
+            </a:solidFill>
+          </a:ln>
+        </p:spPr>
+        <p:txBody>
+          <a:bodyPr wrap="square" rtlCol="0">
+            <a:spAutoFit/>
+          </a:bodyPr>
+          <a:lstStyle>
+            <a:defPPr>
+              <a:defRPr lang="en-US"/>
+            </a:defPPr>
+            <a:lvl1pPr marL="285750" indent="-285750">
+              <a:buFont typeface="Arial" panose="020B0604020202020204" pitchFamily="34" charset="0"/>
+              <a:buChar char="•"/>
+              <a:defRPr sz="1400"/>
+            </a:lvl1pPr>
+          </a:lstStyle>
+          <a:p>
+            <a:r>
+              <a:rPr lang="en-US" b="1" dirty="0">
+                <a:solidFill>
+                  <a:srgbClr val="FF0000"/>
+                </a:solidFill>
+              </a:rPr>
+              <a:t>Shingles</a:t>
+            </a:r>
+            <a:r>
+              <a:rPr lang="en-US" dirty="0"/>
+              <a:t> can withstand an occasional walk. </a:t>
+            </a:r>
+          </a:p>
+          <a:p>
+            <a:r>
+              <a:rPr lang="en-US" dirty="0"/>
+              <a:t>However, if it’s hot outside and/or direct </a:t>
+            </a:r>
+            <a:r>
+              <a:rPr lang="en-US" dirty="0" err="1"/>
+              <a:t>sunlight,the</a:t>
+            </a:r>
+            <a:r>
+              <a:rPr lang="en-US" dirty="0"/>
+              <a:t> asphalt base of the shingle will soften. Walking over soft shingles may damage them.</a:t>
+            </a:r>
+          </a:p>
+          <a:p>
+            <a:r>
+              <a:rPr lang="en-US" dirty="0"/>
+              <a:t>The older the shingles are, the more susceptible they become to damage from foot traffic.</a:t>
+            </a:r>
+          </a:p>
+        </p:txBody>
+      </p:sp>
+      <p:sp>
+        <p:nvSpPr>
+          <p:cNvPr id="7" name="TextBox 6">
+            <a:extLst>
+              <a:ext uri="{FF2B5EF4-FFF2-40B4-BE49-F238E27FC236}">
+                <a16:creationId xmlns:a16="http://schemas.microsoft.com/office/drawing/2014/main" id="{4AA26C70-3640-3B03-46D0-1B667AAFDAD1}"/>
+              </a:ext>
+            </a:extLst>
+          </p:cNvPr>
+          <p:cNvSpPr txBox="1"/>
+          <p:nvPr/>
+        </p:nvSpPr>
+        <p:spPr>
+          <a:xfrm>
+            <a:off x="165370" y="4955792"/>
+            <a:ext cx="5824873" cy="1600438"/>
+          </a:xfrm>
+          <a:prstGeom prst="rect">
+            <a:avLst/>
+          </a:prstGeom>
+          <a:solidFill>
+            <a:schemeClr val="accent4">
+              <a:lumMod val="20000"/>
+              <a:lumOff val="80000"/>
+            </a:schemeClr>
+          </a:solidFill>
+          <a:ln>
+            <a:solidFill>
+              <a:srgbClr val="FF0000"/>
+            </a:solidFill>
+          </a:ln>
+        </p:spPr>
+        <p:txBody>
+          <a:bodyPr wrap="square" rtlCol="0">
+            <a:spAutoFit/>
+          </a:bodyPr>
+          <a:lstStyle/>
+          <a:p>
+            <a:pPr marL="285750" indent="-285750">
+              <a:buFont typeface="Arial" panose="020B0604020202020204" pitchFamily="34" charset="0"/>
+              <a:buChar char="•"/>
+            </a:pPr>
+            <a:r>
+              <a:rPr lang="en-US" sz="1400" dirty="0"/>
+              <a:t>Set your ladder against the gutters and use a bungee cord with hooks to secure the ladder (EPDM tarp bungee strap).</a:t>
+            </a:r>
+          </a:p>
+          <a:p>
+            <a:pPr marL="285750" indent="-285750">
+              <a:buFont typeface="Arial" panose="020B0604020202020204" pitchFamily="34" charset="0"/>
+              <a:buChar char="•"/>
+            </a:pPr>
+            <a:r>
+              <a:rPr lang="en-US" sz="1400" dirty="0"/>
+              <a:t>Use gloves</a:t>
+            </a:r>
+          </a:p>
+          <a:p>
+            <a:pPr marL="285750" indent="-285750">
+              <a:buFont typeface="Arial" panose="020B0604020202020204" pitchFamily="34" charset="0"/>
+              <a:buChar char="•"/>
+            </a:pPr>
+            <a:r>
+              <a:rPr lang="en-US" sz="1400" dirty="0"/>
+              <a:t>Wear long pants. </a:t>
+            </a:r>
+          </a:p>
+          <a:p>
+            <a:pPr marL="285750" indent="-285750">
+              <a:buFont typeface="Arial" panose="020B0604020202020204" pitchFamily="34" charset="0"/>
+              <a:buChar char="•"/>
+            </a:pPr>
+            <a:r>
+              <a:rPr lang="en-US" sz="1400" dirty="0"/>
+              <a:t>An old foam cushion (foam from a sofa seat) can be used to traverse your roof safely. This material really sticks to shingles well, providing a better non-slip surface. Using this also helps minimize damage to the shingles. </a:t>
+            </a:r>
+          </a:p>
+        </p:txBody>
+      </p:sp>
+      <p:sp>
+        <p:nvSpPr>
+          <p:cNvPr id="8" name="TextBox 7">
+            <a:extLst>
+              <a:ext uri="{FF2B5EF4-FFF2-40B4-BE49-F238E27FC236}">
+                <a16:creationId xmlns:a16="http://schemas.microsoft.com/office/drawing/2014/main" id="{2FB4A2A8-F29E-7A49-7509-5E22337A3507}"/>
+              </a:ext>
+            </a:extLst>
+          </p:cNvPr>
+          <p:cNvSpPr txBox="1"/>
+          <p:nvPr/>
+        </p:nvSpPr>
+        <p:spPr>
+          <a:xfrm>
+            <a:off x="8647890" y="1296751"/>
+            <a:ext cx="3368876" cy="2031325"/>
+          </a:xfrm>
+          <a:prstGeom prst="rect">
+            <a:avLst/>
+          </a:prstGeom>
+          <a:solidFill>
+            <a:schemeClr val="accent4">
+              <a:lumMod val="20000"/>
+              <a:lumOff val="80000"/>
+            </a:schemeClr>
+          </a:solidFill>
+          <a:ln>
+            <a:solidFill>
+              <a:srgbClr val="FF0000"/>
+            </a:solidFill>
+          </a:ln>
+        </p:spPr>
+        <p:txBody>
+          <a:bodyPr wrap="square" rtlCol="0">
+            <a:spAutoFit/>
+          </a:bodyPr>
+          <a:lstStyle>
+            <a:defPPr>
+              <a:defRPr lang="en-US"/>
+            </a:defPPr>
+            <a:lvl1pPr marL="285750" indent="-285750">
+              <a:buFont typeface="Arial" panose="020B0604020202020204" pitchFamily="34" charset="0"/>
+              <a:buChar char="•"/>
+              <a:defRPr sz="1400"/>
+            </a:lvl1pPr>
+          </a:lstStyle>
+          <a:p>
+            <a:r>
+              <a:rPr lang="en-US" dirty="0"/>
+              <a:t>Asphalt Shingle Roofing: Best Overall.</a:t>
+            </a:r>
+          </a:p>
+          <a:p>
+            <a:r>
+              <a:rPr lang="en-US" dirty="0"/>
+              <a:t>Slate Roofing: Most Durable.</a:t>
+            </a:r>
+          </a:p>
+          <a:p>
+            <a:r>
+              <a:rPr lang="en-US" dirty="0"/>
+              <a:t>Metal Roofing: Most Versatile.</a:t>
+            </a:r>
+          </a:p>
+          <a:p>
+            <a:r>
+              <a:rPr lang="en-US" dirty="0"/>
+              <a:t>Wood Shingles: Most Environmentally Friendly Option.</a:t>
+            </a:r>
+          </a:p>
+          <a:p>
+            <a:r>
+              <a:rPr lang="en-US" dirty="0"/>
+              <a:t>Clay Tile Roofs: Best Curb Appeal.</a:t>
+            </a:r>
+          </a:p>
+          <a:p>
+            <a:r>
+              <a:rPr lang="en-US" dirty="0"/>
+              <a:t>TPO Roofing: Best for Flat Roof.</a:t>
+            </a:r>
+            <a:br>
+              <a:rPr lang="en-US" dirty="0"/>
+            </a:br>
+            <a:r>
+              <a:rPr lang="en-US" dirty="0"/>
+              <a:t>(TPO = Thermoplastic Polyolefin, a single-ply roofing membrane)</a:t>
+            </a:r>
+          </a:p>
+        </p:txBody>
+      </p:sp>
+      <p:pic>
+        <p:nvPicPr>
+          <p:cNvPr id="12" name="Picture 11">
+            <a:extLst>
+              <a:ext uri="{FF2B5EF4-FFF2-40B4-BE49-F238E27FC236}">
+                <a16:creationId xmlns:a16="http://schemas.microsoft.com/office/drawing/2014/main" id="{476C45B0-CAF9-750F-7ED5-CD9B15F7D602}"/>
+              </a:ext>
+            </a:extLst>
+          </p:cNvPr>
+          <p:cNvPicPr>
+            <a:picLocks noChangeAspect="1"/>
+          </p:cNvPicPr>
+          <p:nvPr/>
+        </p:nvPicPr>
+        <p:blipFill>
+          <a:blip r:embed="rId4" cstate="email">
+            <a:extLst>
+              <a:ext uri="{28A0092B-C50C-407E-A947-70E740481C1C}">
+                <a14:useLocalDpi xmlns:a14="http://schemas.microsoft.com/office/drawing/2010/main"/>
+              </a:ext>
+            </a:extLst>
+          </a:blip>
+          <a:stretch>
+            <a:fillRect/>
+          </a:stretch>
+        </p:blipFill>
+        <p:spPr>
+          <a:xfrm>
+            <a:off x="8647889" y="3512923"/>
+            <a:ext cx="3368875" cy="2932032"/>
+          </a:xfrm>
+          <a:prstGeom prst="rect">
+            <a:avLst/>
+          </a:prstGeom>
+        </p:spPr>
+      </p:pic>
+      <p:pic>
+        <p:nvPicPr>
+          <p:cNvPr id="1028" name="Picture 4" descr="How do I put up a roof ladder? - Home Improvement Stack Exchange">
+            <a:extLst>
+              <a:ext uri="{FF2B5EF4-FFF2-40B4-BE49-F238E27FC236}">
+                <a16:creationId xmlns:a16="http://schemas.microsoft.com/office/drawing/2014/main" id="{63C16DF6-A0E5-8398-0701-716843A9E149}"/>
+              </a:ext>
+            </a:extLst>
+          </p:cNvPr>
+          <p:cNvPicPr>
+            <a:picLocks noChangeAspect="1" noChangeArrowheads="1"/>
+          </p:cNvPicPr>
+          <p:nvPr/>
+        </p:nvPicPr>
+        <p:blipFill>
+          <a:blip r:embed="rId5">
+            <a:extLst>
+              <a:ext uri="{28A0092B-C50C-407E-A947-70E740481C1C}">
+                <a14:useLocalDpi xmlns:a14="http://schemas.microsoft.com/office/drawing/2010/main"/>
+              </a:ext>
+            </a:extLst>
+          </a:blip>
+          <a:srcRect/>
+          <a:stretch>
+            <a:fillRect/>
+          </a:stretch>
+        </p:blipFill>
+        <p:spPr bwMode="auto">
+          <a:xfrm>
+            <a:off x="4912711" y="1289397"/>
+            <a:ext cx="3302000" cy="2832100"/>
+          </a:xfrm>
+          <a:prstGeom prst="rect">
+            <a:avLst/>
+          </a:prstGeom>
+          <a:noFill/>
+          <a:extLst>
+            <a:ext uri="{909E8E84-426E-40DD-AFC4-6F175D3DCCD1}">
+              <a14:hiddenFill xmlns:a14="http://schemas.microsoft.com/office/drawing/2010/main">
+                <a:solidFill>
+                  <a:srgbClr val="FFFFFF"/>
+                </a:solidFill>
+              </a14:hiddenFill>
+            </a:ext>
+          </a:extLst>
+        </p:spPr>
+      </p:pic>
+      <p:sp>
+        <p:nvSpPr>
+          <p:cNvPr id="13" name="TextBox 12">
+            <a:extLst>
+              <a:ext uri="{FF2B5EF4-FFF2-40B4-BE49-F238E27FC236}">
+                <a16:creationId xmlns:a16="http://schemas.microsoft.com/office/drawing/2014/main" id="{B00422D9-EB85-B66C-E359-84CF29024160}"/>
+              </a:ext>
+            </a:extLst>
+          </p:cNvPr>
+          <p:cNvSpPr txBox="1"/>
+          <p:nvPr/>
+        </p:nvSpPr>
+        <p:spPr>
+          <a:xfrm>
+            <a:off x="5774075" y="4128851"/>
+            <a:ext cx="1255609" cy="307777"/>
+          </a:xfrm>
+          <a:prstGeom prst="rect">
+            <a:avLst/>
+          </a:prstGeom>
+          <a:noFill/>
+        </p:spPr>
+        <p:txBody>
+          <a:bodyPr wrap="square" rtlCol="0">
+            <a:spAutoFit/>
+          </a:bodyPr>
+          <a:lstStyle/>
+          <a:p>
+            <a:pPr algn="ctr"/>
+            <a:r>
+              <a:rPr lang="en-US" sz="1400" dirty="0"/>
+              <a:t>Roof Ladder</a:t>
+            </a:r>
+          </a:p>
+        </p:txBody>
+      </p:sp>
+      <p:pic>
+        <p:nvPicPr>
+          <p:cNvPr id="14" name="Picture 13">
+            <a:extLst>
+              <a:ext uri="{FF2B5EF4-FFF2-40B4-BE49-F238E27FC236}">
+                <a16:creationId xmlns:a16="http://schemas.microsoft.com/office/drawing/2014/main" id="{3B3BAB8C-9692-8B72-BE4F-873D89D22E36}"/>
+              </a:ext>
+            </a:extLst>
+          </p:cNvPr>
+          <p:cNvPicPr>
+            <a:picLocks noChangeAspect="1"/>
+          </p:cNvPicPr>
+          <p:nvPr/>
+        </p:nvPicPr>
+        <p:blipFill>
+          <a:blip r:embed="rId6" cstate="email">
+            <a:extLst>
+              <a:ext uri="{28A0092B-C50C-407E-A947-70E740481C1C}">
+                <a14:useLocalDpi xmlns:a14="http://schemas.microsoft.com/office/drawing/2010/main"/>
+              </a:ext>
+            </a:extLst>
+          </a:blip>
+          <a:stretch>
+            <a:fillRect/>
+          </a:stretch>
+        </p:blipFill>
+        <p:spPr>
+          <a:xfrm>
+            <a:off x="6201759" y="4635358"/>
+            <a:ext cx="1930400" cy="1676400"/>
+          </a:xfrm>
+          <a:prstGeom prst="rect">
+            <a:avLst/>
+          </a:prstGeom>
+        </p:spPr>
+      </p:pic>
+      <p:sp>
+        <p:nvSpPr>
+          <p:cNvPr id="15" name="TextBox 14">
+            <a:extLst>
+              <a:ext uri="{FF2B5EF4-FFF2-40B4-BE49-F238E27FC236}">
+                <a16:creationId xmlns:a16="http://schemas.microsoft.com/office/drawing/2014/main" id="{8B3E5C9B-A582-B569-303B-32EB5B66D2A1}"/>
+              </a:ext>
+            </a:extLst>
+          </p:cNvPr>
+          <p:cNvSpPr txBox="1"/>
+          <p:nvPr/>
+        </p:nvSpPr>
+        <p:spPr>
+          <a:xfrm>
+            <a:off x="6456860" y="6183345"/>
+            <a:ext cx="1382322" cy="523220"/>
+          </a:xfrm>
+          <a:prstGeom prst="rect">
+            <a:avLst/>
+          </a:prstGeom>
+          <a:noFill/>
+        </p:spPr>
+        <p:txBody>
+          <a:bodyPr wrap="square" rtlCol="0">
+            <a:spAutoFit/>
+          </a:bodyPr>
+          <a:lstStyle/>
+          <a:p>
+            <a:pPr algn="ctr"/>
+            <a:r>
+              <a:rPr lang="en-US" sz="1400" dirty="0"/>
+              <a:t>EPDM tarp bungee straps</a:t>
+            </a:r>
+          </a:p>
+        </p:txBody>
+      </p:sp>
+    </p:spTree>
+    <p:extLst>
+      <p:ext uri="{BB962C8B-B14F-4D97-AF65-F5344CB8AC3E}">
+        <p14:creationId xmlns:p14="http://schemas.microsoft.com/office/powerpoint/2010/main" val="3234440535"/>
+      </p:ext>
+    </p:extLst>
+  </p:cSld>
+  <p:clrMapOvr>
+    <a:masterClrMapping/>
+  </p:clrMapOvr>
+</p:sld>
+</file>
+
 <file path=ppt/theme/theme1.xml><?xml version="1.0" encoding="utf-8"?>
 <a:theme xmlns:a="http://schemas.openxmlformats.org/drawingml/2006/main" name="Office Theme">
   <a:themeElements>

--- a/chimney_fan.pptx
+++ b/chimney_fan.pptx
@@ -261,7 +261,7 @@
           <a:lstStyle/>
           <a:p>
             <a:fld id="{5F491023-0B0A-7041-9F06-D25A50EF063B}" type="datetimeFigureOut">
-              <a:t>12/31/22</a:t>
+              <a:t>1/1/23</a:t>
             </a:fld>
             <a:endParaRPr lang="en-US"/>
           </a:p>
@@ -457,7 +457,7 @@
           <a:lstStyle/>
           <a:p>
             <a:fld id="{5F491023-0B0A-7041-9F06-D25A50EF063B}" type="datetimeFigureOut">
-              <a:t>12/31/22</a:t>
+              <a:t>1/1/23</a:t>
             </a:fld>
             <a:endParaRPr lang="en-US"/>
           </a:p>
@@ -663,7 +663,7 @@
           <a:lstStyle/>
           <a:p>
             <a:fld id="{5F491023-0B0A-7041-9F06-D25A50EF063B}" type="datetimeFigureOut">
-              <a:t>12/31/22</a:t>
+              <a:t>1/1/23</a:t>
             </a:fld>
             <a:endParaRPr lang="en-US"/>
           </a:p>
@@ -859,7 +859,7 @@
           <a:lstStyle/>
           <a:p>
             <a:fld id="{5F491023-0B0A-7041-9F06-D25A50EF063B}" type="datetimeFigureOut">
-              <a:t>12/31/22</a:t>
+              <a:t>1/1/23</a:t>
             </a:fld>
             <a:endParaRPr lang="en-US"/>
           </a:p>
@@ -1132,7 +1132,7 @@
           <a:lstStyle/>
           <a:p>
             <a:fld id="{5F491023-0B0A-7041-9F06-D25A50EF063B}" type="datetimeFigureOut">
-              <a:t>12/31/22</a:t>
+              <a:t>1/1/23</a:t>
             </a:fld>
             <a:endParaRPr lang="en-US"/>
           </a:p>
@@ -1395,7 +1395,7 @@
           <a:lstStyle/>
           <a:p>
             <a:fld id="{5F491023-0B0A-7041-9F06-D25A50EF063B}" type="datetimeFigureOut">
-              <a:t>12/31/22</a:t>
+              <a:t>1/1/23</a:t>
             </a:fld>
             <a:endParaRPr lang="en-US"/>
           </a:p>
@@ -1805,7 +1805,7 @@
           <a:lstStyle/>
           <a:p>
             <a:fld id="{5F491023-0B0A-7041-9F06-D25A50EF063B}" type="datetimeFigureOut">
-              <a:t>12/31/22</a:t>
+              <a:t>1/1/23</a:t>
             </a:fld>
             <a:endParaRPr lang="en-US"/>
           </a:p>
@@ -1944,7 +1944,7 @@
           <a:lstStyle/>
           <a:p>
             <a:fld id="{5F491023-0B0A-7041-9F06-D25A50EF063B}" type="datetimeFigureOut">
-              <a:t>12/31/22</a:t>
+              <a:t>1/1/23</a:t>
             </a:fld>
             <a:endParaRPr lang="en-US"/>
           </a:p>
@@ -2055,7 +2055,7 @@
           <a:lstStyle/>
           <a:p>
             <a:fld id="{5F491023-0B0A-7041-9F06-D25A50EF063B}" type="datetimeFigureOut">
-              <a:t>12/31/22</a:t>
+              <a:t>1/1/23</a:t>
             </a:fld>
             <a:endParaRPr lang="en-US"/>
           </a:p>
@@ -2364,7 +2364,7 @@
           <a:lstStyle/>
           <a:p>
             <a:fld id="{5F491023-0B0A-7041-9F06-D25A50EF063B}" type="datetimeFigureOut">
-              <a:t>12/31/22</a:t>
+              <a:t>1/1/23</a:t>
             </a:fld>
             <a:endParaRPr lang="en-US"/>
           </a:p>
@@ -2650,7 +2650,7 @@
           <a:lstStyle/>
           <a:p>
             <a:fld id="{5F491023-0B0A-7041-9F06-D25A50EF063B}" type="datetimeFigureOut">
-              <a:t>12/31/22</a:t>
+              <a:t>1/1/23</a:t>
             </a:fld>
             <a:endParaRPr lang="en-US"/>
           </a:p>
@@ -2889,7 +2889,7 @@
           </a:lstStyle>
           <a:p>
             <a:fld id="{5F491023-0B0A-7041-9F06-D25A50EF063B}" type="datetimeFigureOut">
-              <a:t>12/31/22</a:t>
+              <a:t>1/1/23</a:t>
             </a:fld>
             <a:endParaRPr lang="en-US"/>
           </a:p>
@@ -4498,8 +4498,8 @@
         </p:nvSpPr>
         <p:spPr>
           <a:xfrm>
-            <a:off x="8647890" y="1296751"/>
-            <a:ext cx="3368876" cy="2031325"/>
+            <a:off x="9484467" y="114795"/>
+            <a:ext cx="2619847" cy="3323987"/>
           </a:xfrm>
           <a:prstGeom prst="rect">
             <a:avLst/>
@@ -4626,7 +4626,7 @@
           <p:nvPr/>
         </p:nvPicPr>
         <p:blipFill>
-          <a:blip r:embed="rId5">
+          <a:blip r:embed="rId5" cstate="email">
             <a:extLst>
               <a:ext uri="{28A0092B-C50C-407E-A947-70E740481C1C}">
                 <a14:useLocalDpi xmlns:a14="http://schemas.microsoft.com/office/drawing/2010/main"/>
@@ -4640,8 +4640,8 @@
         </p:blipFill>
         <p:spPr bwMode="auto">
           <a:xfrm>
-            <a:off x="4912711" y="1289397"/>
-            <a:ext cx="3302000" cy="2832100"/>
+            <a:off x="4230017" y="1296751"/>
+            <a:ext cx="1865983" cy="1600439"/>
           </a:xfrm>
           <a:prstGeom prst="rect">
             <a:avLst/>
@@ -4672,7 +4672,7 @@
         </p:nvSpPr>
         <p:spPr>
           <a:xfrm>
-            <a:off x="5774075" y="4128851"/>
+            <a:off x="4479533" y="2921970"/>
             <a:ext cx="1255609" cy="307777"/>
           </a:xfrm>
           <a:prstGeom prst="rect">
@@ -4763,6 +4763,119 @@
               <a:rPr lang="en-US" sz="1400" dirty="0"/>
               <a:t>EPDM tarp bungee straps</a:t>
             </a:r>
+          </a:p>
+        </p:txBody>
+      </p:sp>
+      <p:pic>
+        <p:nvPicPr>
+          <p:cNvPr id="1026" name="Picture 2">
+            <a:extLst>
+              <a:ext uri="{FF2B5EF4-FFF2-40B4-BE49-F238E27FC236}">
+                <a16:creationId xmlns:a16="http://schemas.microsoft.com/office/drawing/2014/main" id="{90B24212-347D-8D09-6920-0AF015AE5446}"/>
+              </a:ext>
+            </a:extLst>
+          </p:cNvPr>
+          <p:cNvPicPr>
+            <a:picLocks noChangeAspect="1" noChangeArrowheads="1"/>
+          </p:cNvPicPr>
+          <p:nvPr/>
+        </p:nvPicPr>
+        <p:blipFill rotWithShape="1">
+          <a:blip r:embed="rId7" cstate="email">
+            <a:extLst>
+              <a:ext uri="{28A0092B-C50C-407E-A947-70E740481C1C}">
+                <a14:useLocalDpi xmlns:a14="http://schemas.microsoft.com/office/drawing/2010/main"/>
+              </a:ext>
+            </a:extLst>
+          </a:blip>
+          <a:srcRect/>
+          <a:stretch/>
+        </p:blipFill>
+        <p:spPr bwMode="auto">
+          <a:xfrm>
+            <a:off x="6201759" y="261610"/>
+            <a:ext cx="3145448" cy="1905000"/>
+          </a:xfrm>
+          <a:prstGeom prst="rect">
+            <a:avLst/>
+          </a:prstGeom>
+          <a:noFill/>
+          <a:extLst>
+            <a:ext uri="{909E8E84-426E-40DD-AFC4-6F175D3DCCD1}">
+              <a14:hiddenFill xmlns:a14="http://schemas.microsoft.com/office/drawing/2010/main">
+                <a:solidFill>
+                  <a:srgbClr val="FFFFFF"/>
+                </a:solidFill>
+              </a14:hiddenFill>
+            </a:ext>
+          </a:extLst>
+        </p:spPr>
+      </p:pic>
+      <p:sp>
+        <p:nvSpPr>
+          <p:cNvPr id="3" name="TextBox 2">
+            <a:extLst>
+              <a:ext uri="{FF2B5EF4-FFF2-40B4-BE49-F238E27FC236}">
+                <a16:creationId xmlns:a16="http://schemas.microsoft.com/office/drawing/2014/main" id="{40E0FF80-1802-5671-4CC4-41B022387FC3}"/>
+              </a:ext>
+            </a:extLst>
+          </p:cNvPr>
+          <p:cNvSpPr txBox="1"/>
+          <p:nvPr/>
+        </p:nvSpPr>
+        <p:spPr>
+          <a:xfrm>
+            <a:off x="6573122" y="2255036"/>
+            <a:ext cx="2570408" cy="646331"/>
+          </a:xfrm>
+          <a:prstGeom prst="rect">
+            <a:avLst/>
+          </a:prstGeom>
+          <a:noFill/>
+        </p:spPr>
+        <p:txBody>
+          <a:bodyPr wrap="square" rtlCol="0">
+            <a:spAutoFit/>
+          </a:bodyPr>
+          <a:lstStyle/>
+          <a:p>
+            <a:r>
+              <a:rPr lang="en-US" sz="1200" dirty="0"/>
+              <a:t>roofing glossary:</a:t>
+            </a:r>
+          </a:p>
+          <a:p>
+            <a:r>
+              <a:rPr lang="en-US" sz="1200" dirty="0">
+                <a:hlinkClick r:id="rId8"/>
+              </a:rPr>
+              <a:t>https://</a:t>
+            </a:r>
+            <a:r>
+              <a:rPr lang="en-US" sz="1200" dirty="0" err="1">
+                <a:hlinkClick r:id="rId8"/>
+              </a:rPr>
+              <a:t>www.owenscorning.com</a:t>
+            </a:r>
+            <a:r>
+              <a:rPr lang="en-US" sz="1200" dirty="0">
+                <a:hlinkClick r:id="rId8"/>
+              </a:rPr>
+              <a:t>/</a:t>
+            </a:r>
+            <a:r>
+              <a:rPr lang="en-US" sz="1200" dirty="0" err="1">
+                <a:hlinkClick r:id="rId8"/>
+              </a:rPr>
+              <a:t>en</a:t>
+            </a:r>
+            <a:r>
+              <a:rPr lang="en-US" sz="1200" dirty="0">
+                <a:hlinkClick r:id="rId8"/>
+              </a:rPr>
+              <a:t>-us/roofing/tools/roofing-glossary</a:t>
+            </a:r>
+            <a:endParaRPr lang="en-US" sz="1200" dirty="0"/>
           </a:p>
         </p:txBody>
       </p:sp>
